--- a/report/final_report/presentation/AI_Booster_최종발표_DrillMusic.pptx
+++ b/report/final_report/presentation/AI_Booster_최종발표_DrillMusic.pptx
@@ -9537,7 +9537,7 @@
         <p:spPr>
           <a:xfrm>
             <a:off x="4114800" y="4297680"/>
-            <a:ext cx="3383280" cy="1554480"/>
+            <a:ext cx="3383280" cy="1143903"/>
           </a:xfrm>
           <a:prstGeom prst="rect">
             <a:avLst/>
@@ -9556,7 +9556,7 @@
               </a:spcAft>
             </a:pPr>
             <a:r>
-              <a:rPr sz="1200" b="1">
+              <a:rPr sz="1200" b="1" dirty="0">
                 <a:solidFill>
                   <a:srgbClr val="3FB950"/>
                 </a:solidFill>
@@ -9573,28 +9573,122 @@
               </a:spcAft>
             </a:pPr>
             <a:r>
-              <a:rPr sz="3600" b="1">
+              <a:rPr lang="ko-KR" altLang="en-US" sz="3600" b="1" dirty="0">
                 <a:solidFill>
                   <a:srgbClr val="8B949E"/>
                 </a:solidFill>
                 <a:latin typeface="Calibri"/>
                 <a:ea typeface="맑은 고딕"/>
               </a:rPr>
-              <a:t>진행 중</a:t>
-            </a:r>
+              <a:t>개발 중단</a:t>
+            </a:r>
+            <a:r>
+              <a:rPr lang="en-US" altLang="ko-KR" sz="1200" b="1" dirty="0">
+                <a:solidFill>
+                  <a:srgbClr val="8B949E"/>
+                </a:solidFill>
+                <a:latin typeface="Calibri"/>
+                <a:ea typeface="맑은 고딕"/>
+              </a:rPr>
+              <a:t>(</a:t>
+            </a:r>
+            <a:r>
+              <a:rPr lang="ko-KR" altLang="en-US" sz="1200" b="1" dirty="0">
+                <a:solidFill>
+                  <a:srgbClr val="8B949E"/>
+                </a:solidFill>
+                <a:latin typeface="Calibri"/>
+                <a:ea typeface="맑은 고딕"/>
+              </a:rPr>
+              <a:t>알고리즘 집중</a:t>
+            </a:r>
+            <a:r>
+              <a:rPr lang="en-US" altLang="ko-KR" sz="1200" b="1" dirty="0">
+                <a:solidFill>
+                  <a:srgbClr val="8B949E"/>
+                </a:solidFill>
+                <a:latin typeface="Calibri"/>
+                <a:ea typeface="맑은 고딕"/>
+              </a:rPr>
+              <a:t>)</a:t>
+            </a:r>
+            <a:endParaRPr sz="3600" b="1" dirty="0">
+              <a:solidFill>
+                <a:srgbClr val="8B949E"/>
+              </a:solidFill>
+              <a:latin typeface="Calibri"/>
+              <a:ea typeface="맑은 고딕"/>
+            </a:endParaRPr>
           </a:p>
           <a:p>
             <a:pPr algn="l"/>
             <a:r>
-              <a:rPr sz="1200" b="0">
+              <a:rPr sz="1200" b="0" dirty="0" err="1">
                 <a:solidFill>
                   <a:srgbClr val="8B949E"/>
                 </a:solidFill>
                 <a:latin typeface="Calibri"/>
                 <a:ea typeface="맑은 고딕"/>
               </a:rPr>
-              <a:t>앱 모듈만 완성</a:t>
-            </a:r>
+              <a:t>앱</a:t>
+            </a:r>
+            <a:r>
+              <a:rPr sz="1200" b="0" dirty="0">
+                <a:solidFill>
+                  <a:srgbClr val="8B949E"/>
+                </a:solidFill>
+                <a:latin typeface="Calibri"/>
+                <a:ea typeface="맑은 고딕"/>
+              </a:rPr>
+              <a:t> </a:t>
+            </a:r>
+            <a:r>
+              <a:rPr sz="1200" b="0" dirty="0" err="1">
+                <a:solidFill>
+                  <a:srgbClr val="8B949E"/>
+                </a:solidFill>
+                <a:latin typeface="Calibri"/>
+                <a:ea typeface="맑은 고딕"/>
+              </a:rPr>
+              <a:t>모듈</a:t>
+            </a:r>
+            <a:r>
+              <a:rPr lang="ko-KR" altLang="en-US" sz="1200" b="0" dirty="0">
+                <a:solidFill>
+                  <a:srgbClr val="8B949E"/>
+                </a:solidFill>
+                <a:latin typeface="Calibri"/>
+                <a:ea typeface="맑은 고딕"/>
+              </a:rPr>
+              <a:t> 프로토타입</a:t>
+            </a:r>
+            <a:r>
+              <a:rPr sz="1200" b="0" dirty="0">
+                <a:solidFill>
+                  <a:srgbClr val="8B949E"/>
+                </a:solidFill>
+                <a:latin typeface="Calibri"/>
+                <a:ea typeface="맑은 고딕"/>
+              </a:rPr>
+              <a:t> </a:t>
+            </a:r>
+            <a:r>
+              <a:rPr sz="1200" b="0" dirty="0" err="1">
+                <a:solidFill>
+                  <a:srgbClr val="8B949E"/>
+                </a:solidFill>
+                <a:latin typeface="Calibri"/>
+                <a:ea typeface="맑은 고딕"/>
+              </a:rPr>
+              <a:t>완성</a:t>
+            </a:r>
+            <a:endParaRPr sz="1200" b="0" dirty="0">
+              <a:solidFill>
+                <a:srgbClr val="8B949E"/>
+              </a:solidFill>
+              <a:latin typeface="Calibri"/>
+              <a:ea typeface="맑은 고딕"/>
+            </a:endParaRPr>
           </a:p>
         </p:txBody>
       </p:sp>
